--- a/dataset/guides_final/SEC/manual/IT-SEC-002-M_보안 프로그램(백신·EDR) 알림 처리 매뉴얼.pptx
+++ b/dataset/guides_final/SEC/manual/IT-SEC-002-M_보안 프로그램(백신·EDR) 알림 처리 매뉴얼.pptx
@@ -32816,7 +32816,7 @@
                 <a:ea typeface="Malgun Gothic"/>
                 <a:cs typeface="Malgun Gothic"/>
               </a:rPr>
-              <a:t>티켓: 오탐 분석·예외 등록처럼 담당자 조치가 필요한 건. 정보보안팀에 배정하고 RDY → IP → FIN → CLS 으로 관리한다.</a:t>
+              <a:t>티켓: 오탐 분석·예외 등록처럼 담당자 조치가 필요한 건. 정보보안팀에 배정하고 RDY → WIP → FIN → CLS 으로 관리한다.</a:t>
             </a:r>
           </a:p>
         </p:txBody>

--- a/dataset/guides_final/SEC/manual/IT-SEC-002-M_보안 프로그램(백신·EDR) 알림 처리 매뉴얼.pptx
+++ b/dataset/guides_final/SEC/manual/IT-SEC-002-M_보안 프로그램(백신·EDR) 알림 처리 매뉴얼.pptx
@@ -3240,7 +3240,7 @@
                 <a:ea typeface="Malgun Gothic"/>
                 <a:cs typeface="Malgun Gothic"/>
               </a:rPr>
-              <a:t>한화시스템 ICT IT 담당자 매뉴얼 · 정보보안</a:t>
+              <a:t>가상 ICT 기업 IT 담당자 매뉴얼 · 정보보안</a:t>
             </a:r>
           </a:p>
         </p:txBody>
@@ -3519,7 +3519,7 @@
                 <a:ea typeface="Malgun Gothic"/>
                 <a:cs typeface="Malgun Gothic"/>
               </a:rPr>
-              <a:t>© HANWHA SYSTEMS ICT · IT-SEC-002-M · 사내 제한</a:t>
+              <a:t>© 가상 ICT 기업 · IT-SEC-002-M · 사내 제한</a:t>
             </a:r>
           </a:p>
         </p:txBody>
@@ -5731,7 +5731,7 @@
                 <a:ea typeface="Malgun Gothic"/>
                 <a:cs typeface="Malgun Gothic"/>
               </a:rPr>
-              <a:t>© HANWHA SYSTEMS ICT · IT-SEC-002-M · 사내 제한</a:t>
+              <a:t>© 가상 ICT 기업 · IT-SEC-002-M · 사내 제한</a:t>
             </a:r>
           </a:p>
         </p:txBody>
@@ -6781,7 +6781,7 @@
                 <a:ea typeface="Malgun Gothic"/>
                 <a:cs typeface="Malgun Gothic"/>
               </a:rPr>
-              <a:t>© HANWHA SYSTEMS ICT · IT-SEC-002-M · 사내 제한</a:t>
+              <a:t>© 가상 ICT 기업 · IT-SEC-002-M · 사내 제한</a:t>
             </a:r>
           </a:p>
         </p:txBody>
@@ -7800,7 +7800,7 @@
                 <a:ea typeface="Malgun Gothic"/>
                 <a:cs typeface="Malgun Gothic"/>
               </a:rPr>
-              <a:t>© HANWHA SYSTEMS ICT · IT-SEC-002-M · 사내 제한</a:t>
+              <a:t>© 가상 ICT 기업 · IT-SEC-002-M · 사내 제한</a:t>
             </a:r>
           </a:p>
         </p:txBody>
@@ -10012,7 +10012,7 @@
                 <a:ea typeface="Malgun Gothic"/>
                 <a:cs typeface="Malgun Gothic"/>
               </a:rPr>
-              <a:t>© HANWHA SYSTEMS ICT · IT-SEC-002-M · 사내 제한</a:t>
+              <a:t>© 가상 ICT 기업 · IT-SEC-002-M · 사내 제한</a:t>
             </a:r>
           </a:p>
         </p:txBody>
@@ -11022,7 +11022,7 @@
                 <a:ea typeface="Malgun Gothic"/>
                 <a:cs typeface="Malgun Gothic"/>
               </a:rPr>
-              <a:t>© HANWHA SYSTEMS ICT · IT-SEC-002-M · 사내 제한</a:t>
+              <a:t>© 가상 ICT 기업 · IT-SEC-002-M · 사내 제한</a:t>
             </a:r>
           </a:p>
         </p:txBody>
@@ -12407,7 +12407,7 @@
                 <a:ea typeface="Malgun Gothic"/>
                 <a:cs typeface="Malgun Gothic"/>
               </a:rPr>
-              <a:t>© HANWHA SYSTEMS ICT · IT-SEC-002-M · 사내 제한</a:t>
+              <a:t>© 가상 ICT 기업 · IT-SEC-002-M · 사내 제한</a:t>
             </a:r>
           </a:p>
         </p:txBody>
@@ -15158,7 +15158,7 @@
                 <a:ea typeface="Malgun Gothic"/>
                 <a:cs typeface="Malgun Gothic"/>
               </a:rPr>
-              <a:t>© HANWHA SYSTEMS ICT · IT-SEC-002-M · 사내 제한</a:t>
+              <a:t>© 가상 ICT 기업 · IT-SEC-002-M · 사내 제한</a:t>
             </a:r>
           </a:p>
         </p:txBody>
@@ -16381,7 +16381,7 @@
                 <a:ea typeface="Malgun Gothic"/>
                 <a:cs typeface="Malgun Gothic"/>
               </a:rPr>
-              <a:t>© HANWHA SYSTEMS ICT · IT-SEC-002-M · 사내 제한</a:t>
+              <a:t>© 가상 ICT 기업 · IT-SEC-002-M · 사내 제한</a:t>
             </a:r>
           </a:p>
         </p:txBody>
@@ -18593,7 +18593,7 @@
                 <a:ea typeface="Malgun Gothic"/>
                 <a:cs typeface="Malgun Gothic"/>
               </a:rPr>
-              <a:t>© HANWHA SYSTEMS ICT · IT-SEC-002-M · 사내 제한</a:t>
+              <a:t>© 가상 ICT 기업 · IT-SEC-002-M · 사내 제한</a:t>
             </a:r>
           </a:p>
         </p:txBody>
@@ -19831,7 +19831,7 @@
                 <a:ea typeface="Malgun Gothic"/>
                 <a:cs typeface="Malgun Gothic"/>
               </a:rPr>
-              <a:t>© HANWHA SYSTEMS ICT · IT-SEC-002-M · 사내 제한</a:t>
+              <a:t>© 가상 ICT 기업 · IT-SEC-002-M · 사내 제한</a:t>
             </a:r>
           </a:p>
         </p:txBody>
@@ -21474,7 +21474,7 @@
                 <a:ea typeface="Malgun Gothic"/>
                 <a:cs typeface="Malgun Gothic"/>
               </a:rPr>
-              <a:t>© HANWHA SYSTEMS ICT · IT-SEC-002-M · 사내 제한</a:t>
+              <a:t>© 가상 ICT 기업 · IT-SEC-002-M · 사내 제한</a:t>
             </a:r>
           </a:p>
         </p:txBody>
@@ -22631,7 +22631,7 @@
                 <a:ea typeface="Malgun Gothic"/>
                 <a:cs typeface="Malgun Gothic"/>
               </a:rPr>
-              <a:t>© HANWHA SYSTEMS ICT · IT-SEC-002-M · 사내 제한</a:t>
+              <a:t>© 가상 ICT 기업 · IT-SEC-002-M · 사내 제한</a:t>
             </a:r>
           </a:p>
         </p:txBody>
@@ -22879,7 +22879,7 @@
                 <a:ea typeface="Malgun Gothic"/>
                 <a:cs typeface="Malgun Gothic"/>
               </a:rPr>
-              <a:t>© HANWHA SYSTEMS ICT · IT-SEC-002-M · 사내 제한</a:t>
+              <a:t>© 가상 ICT 기업 · IT-SEC-002-M · 사내 제한</a:t>
             </a:r>
           </a:p>
         </p:txBody>
@@ -23723,7 +23723,7 @@
                 <a:ea typeface="Malgun Gothic"/>
                 <a:cs typeface="Malgun Gothic"/>
               </a:rPr>
-              <a:t>© HANWHA SYSTEMS ICT · IT-SEC-002-M · 사내 제한</a:t>
+              <a:t>© 가상 ICT 기업 · IT-SEC-002-M · 사내 제한</a:t>
             </a:r>
           </a:p>
         </p:txBody>
@@ -23971,7 +23971,7 @@
                 <a:ea typeface="Malgun Gothic"/>
                 <a:cs typeface="Malgun Gothic"/>
               </a:rPr>
-              <a:t>© HANWHA SYSTEMS ICT · IT-SEC-002-M · 사내 제한</a:t>
+              <a:t>© 가상 ICT 기업 · IT-SEC-002-M · 사내 제한</a:t>
             </a:r>
           </a:p>
         </p:txBody>
@@ -25111,7 +25111,7 @@
                 <a:ea typeface="Malgun Gothic"/>
                 <a:cs typeface="Malgun Gothic"/>
               </a:rPr>
-              <a:t>© HANWHA SYSTEMS ICT · IT-SEC-002-M · 사내 제한</a:t>
+              <a:t>© 가상 ICT 기업 · IT-SEC-002-M · 사내 제한</a:t>
             </a:r>
           </a:p>
         </p:txBody>
@@ -25359,7 +25359,7 @@
                 <a:ea typeface="Malgun Gothic"/>
                 <a:cs typeface="Malgun Gothic"/>
               </a:rPr>
-              <a:t>© HANWHA SYSTEMS ICT · IT-SEC-002-M · 사내 제한</a:t>
+              <a:t>© 가상 ICT 기업 · IT-SEC-002-M · 사내 제한</a:t>
             </a:r>
           </a:p>
         </p:txBody>
@@ -26838,7 +26838,7 @@
                 <a:ea typeface="Malgun Gothic"/>
                 <a:cs typeface="Malgun Gothic"/>
               </a:rPr>
-              <a:t>© HANWHA SYSTEMS ICT · IT-SEC-002-M · 사내 제한</a:t>
+              <a:t>© 가상 ICT 기업 · IT-SEC-002-M · 사내 제한</a:t>
             </a:r>
           </a:p>
         </p:txBody>
@@ -27768,7 +27768,7 @@
                 <a:ea typeface="Malgun Gothic"/>
                 <a:cs typeface="Malgun Gothic"/>
               </a:rPr>
-              <a:t>© HANWHA SYSTEMS ICT · IT-SEC-002-M · 사내 제한</a:t>
+              <a:t>© 가상 ICT 기업 · IT-SEC-002-M · 사내 제한</a:t>
             </a:r>
           </a:p>
         </p:txBody>
@@ -28914,7 +28914,7 @@
                 <a:ea typeface="Malgun Gothic"/>
                 <a:cs typeface="Malgun Gothic"/>
               </a:rPr>
-              <a:t>© HANWHA SYSTEMS ICT · IT-SEC-002-M · 사내 제한</a:t>
+              <a:t>© 가상 ICT 기업 · IT-SEC-002-M · 사내 제한</a:t>
             </a:r>
           </a:p>
         </p:txBody>
@@ -29162,7 +29162,7 @@
                 <a:ea typeface="Malgun Gothic"/>
                 <a:cs typeface="Malgun Gothic"/>
               </a:rPr>
-              <a:t>© HANWHA SYSTEMS ICT · IT-SEC-002-M · 사내 제한</a:t>
+              <a:t>© 가상 ICT 기업 · IT-SEC-002-M · 사내 제한</a:t>
             </a:r>
           </a:p>
         </p:txBody>
@@ -30084,7 +30084,7 @@
                 <a:ea typeface="Malgun Gothic"/>
                 <a:cs typeface="Malgun Gothic"/>
               </a:rPr>
-              <a:t>© HANWHA SYSTEMS ICT · IT-SEC-002-M · 사내 제한</a:t>
+              <a:t>© 가상 ICT 기업 · IT-SEC-002-M · 사내 제한</a:t>
             </a:r>
           </a:p>
         </p:txBody>
@@ -30332,7 +30332,7 @@
                 <a:ea typeface="Malgun Gothic"/>
                 <a:cs typeface="Malgun Gothic"/>
               </a:rPr>
-              <a:t>© HANWHA SYSTEMS ICT · IT-SEC-002-M · 사내 제한</a:t>
+              <a:t>© 가상 ICT 기업 · IT-SEC-002-M · 사내 제한</a:t>
             </a:r>
           </a:p>
         </p:txBody>
@@ -33380,7 +33380,7 @@
                 <a:ea typeface="Malgun Gothic"/>
                 <a:cs typeface="Malgun Gothic"/>
               </a:rPr>
-              <a:t>© HANWHA SYSTEMS ICT · IT-SEC-002-M · 사내 제한</a:t>
+              <a:t>© 가상 ICT 기업 · IT-SEC-002-M · 사내 제한</a:t>
             </a:r>
           </a:p>
         </p:txBody>
@@ -33825,7 +33825,7 @@
                 <a:ea typeface="Malgun Gothic"/>
                 <a:cs typeface="Malgun Gothic"/>
               </a:rPr>
-              <a:t>© HANWHA SYSTEMS ICT · IT-SEC-002-M · 사내 제한</a:t>
+              <a:t>© 가상 ICT 기업 · IT-SEC-002-M · 사내 제한</a:t>
             </a:r>
           </a:p>
         </p:txBody>
@@ -34073,7 +34073,7 @@
                 <a:ea typeface="Malgun Gothic"/>
                 <a:cs typeface="Malgun Gothic"/>
               </a:rPr>
-              <a:t>© HANWHA SYSTEMS ICT · IT-SEC-002-M · 사내 제한</a:t>
+              <a:t>© 가상 ICT 기업 · IT-SEC-002-M · 사내 제한</a:t>
             </a:r>
           </a:p>
         </p:txBody>
